--- a/curriculum/unit-3-endpoints-deps-scale/module-3-3-downstreams-are-tabs.pptx
+++ b/curriculum/unit-3-endpoints-deps-scale/module-3-3-downstreams-are-tabs.pptx
@@ -1858,7 +1858,7 @@
                 <a:ea typeface="Segoe UI" pitchFamily="34" charset="-122"/>
                 <a:cs typeface="Segoe UI" pitchFamily="34" charset="-120"/>
               </a:rPr>
-              <a:t>Your service calls Postgres. In Classic, Postgres showed up as a </a:t>
+              <a:t>Your service calls Postgres. Under SDv1, Postgres showed up as a </a:t>
             </a:r>
             <a:pPr indent="0" marL="0">
               <a:buNone/>
@@ -2010,7 +2010,7 @@
                 <a:ea typeface="Segoe UI" pitchFamily="34" charset="-122"/>
                 <a:cs typeface="Segoe UI" pitchFamily="34" charset="-120"/>
               </a:rPr>
-              <a:t>In Latest, that row often doesn't exist.</a:t>
+              <a:t>Under SDv2, that row often doesn't exist.</a:t>
             </a:r>
             <a:endParaRPr lang="en-US" sz="2000" dirty="0"/>
           </a:p>
@@ -3004,7 +3004,7 @@
                 <a:ea typeface="Segoe UI" pitchFamily="34" charset="-122"/>
                 <a:cs typeface="Segoe UI" pitchFamily="34" charset="-120"/>
               </a:rPr>
-              <a:t>In Classic, </a:t>
+              <a:t>Under SDv1, </a:t>
             </a:r>
             <a:pPr indent="0" marL="0">
               <a:buNone/>
